--- a/presentations/Technical Presentation.pptx
+++ b/presentations/Technical Presentation.pptx
@@ -10499,126 +10499,6 @@
       </p:sp>
       <p:sp>
         <p:nvSpPr>
-          <p:cNvPr id="14" name="object 14"/>
-          <p:cNvSpPr txBox="1"/>
-          <p:nvPr/>
-        </p:nvSpPr>
-        <p:spPr>
-          <a:xfrm>
-            <a:off x="891256" y="3729566"/>
-            <a:ext cx="5618314" cy="671979"/>
-          </a:xfrm>
-          <a:prstGeom prst="rect">
-            <a:avLst/>
-          </a:prstGeom>
-        </p:spPr>
-        <p:txBody>
-          <a:bodyPr vert="horz" wrap="square" lIns="0" tIns="43180" rIns="0" bIns="0" rtlCol="0">
-            <a:spAutoFit/>
-          </a:bodyPr>
-          <a:lstStyle/>
-          <a:p>
-            <a:pPr marL="1322070" marR="5080" indent="-1310005" algn="ctr">
-              <a:lnSpc>
-                <a:spcPts val="2300"/>
-              </a:lnSpc>
-              <a:spcBef>
-                <a:spcPts val="340"/>
-              </a:spcBef>
-            </a:pPr>
-            <a:r>
-              <a:rPr sz="2050" dirty="0">
-                <a:latin typeface="+mn-lt"/>
-                <a:cs typeface="Arial MT"/>
-              </a:rPr>
-              <a:t>Count</a:t>
-            </a:r>
-            <a:r>
-              <a:rPr sz="2050" spc="45" dirty="0">
-                <a:latin typeface="+mn-lt"/>
-                <a:cs typeface="Arial MT"/>
-              </a:rPr>
-              <a:t> </a:t>
-            </a:r>
-            <a:r>
-              <a:rPr sz="2050" dirty="0">
-                <a:latin typeface="+mn-lt"/>
-                <a:cs typeface="Arial MT"/>
-              </a:rPr>
-              <a:t>of</a:t>
-            </a:r>
-            <a:r>
-              <a:rPr sz="2050" spc="-45" dirty="0">
-                <a:latin typeface="+mn-lt"/>
-                <a:cs typeface="Arial MT"/>
-              </a:rPr>
-              <a:t> </a:t>
-            </a:r>
-            <a:r>
-              <a:rPr sz="2050" dirty="0">
-                <a:latin typeface="+mn-lt"/>
-                <a:cs typeface="Arial MT"/>
-              </a:rPr>
-              <a:t>Dropout</a:t>
-            </a:r>
-            <a:r>
-              <a:rPr sz="2050" spc="30" dirty="0">
-                <a:latin typeface="+mn-lt"/>
-                <a:cs typeface="Arial MT"/>
-              </a:rPr>
-              <a:t> </a:t>
-            </a:r>
-            <a:r>
-              <a:rPr sz="2050" spc="-10" dirty="0">
-                <a:latin typeface="+mn-lt"/>
-                <a:cs typeface="Arial MT"/>
-              </a:rPr>
-              <a:t>and</a:t>
-            </a:r>
-            <a:r>
-              <a:rPr sz="2050" spc="-140" dirty="0">
-                <a:latin typeface="+mn-lt"/>
-                <a:cs typeface="Arial MT"/>
-              </a:rPr>
-              <a:t> </a:t>
-            </a:r>
-            <a:endParaRPr lang="en-PH" sz="2050" spc="-140" dirty="0">
-              <a:latin typeface="+mn-lt"/>
-              <a:cs typeface="Arial MT"/>
-            </a:endParaRPr>
-          </a:p>
-          <a:p>
-            <a:pPr marL="1322070" marR="5080" indent="-1310005" algn="ctr">
-              <a:lnSpc>
-                <a:spcPts val="2300"/>
-              </a:lnSpc>
-              <a:spcBef>
-                <a:spcPts val="340"/>
-              </a:spcBef>
-            </a:pPr>
-            <a:r>
-              <a:rPr sz="2050" spc="-20" dirty="0">
-                <a:latin typeface="+mn-lt"/>
-                <a:cs typeface="Arial MT"/>
-              </a:rPr>
-              <a:t>Graduate </a:t>
-            </a:r>
-            <a:r>
-              <a:rPr sz="2050" spc="-10" dirty="0">
-                <a:latin typeface="+mn-lt"/>
-                <a:cs typeface="Arial MT"/>
-              </a:rPr>
-              <a:t>Students</a:t>
-            </a:r>
-            <a:endParaRPr sz="2050" dirty="0">
-              <a:latin typeface="+mn-lt"/>
-              <a:cs typeface="Arial MT"/>
-            </a:endParaRPr>
-          </a:p>
-        </p:txBody>
-      </p:sp>
-      <p:sp>
-        <p:nvSpPr>
           <p:cNvPr id="17" name="object 17"/>
           <p:cNvSpPr txBox="1"/>
           <p:nvPr/>
@@ -10907,51 +10787,6 @@
           </a:p>
         </p:txBody>
       </p:sp>
-      <p:sp>
-        <p:nvSpPr>
-          <p:cNvPr id="27" name="object 14">
-            <a:extLst>
-              <a:ext uri="{FF2B5EF4-FFF2-40B4-BE49-F238E27FC236}">
-                <a16:creationId xmlns:a16="http://schemas.microsoft.com/office/drawing/2014/main" id="{1F407C9D-AB9C-3656-FAE6-750E78D60394}"/>
-              </a:ext>
-            </a:extLst>
-          </p:cNvPr>
-          <p:cNvSpPr txBox="1"/>
-          <p:nvPr/>
-        </p:nvSpPr>
-        <p:spPr>
-          <a:xfrm>
-            <a:off x="11161660" y="3756460"/>
-            <a:ext cx="5850725" cy="633507"/>
-          </a:xfrm>
-          <a:prstGeom prst="rect">
-            <a:avLst/>
-          </a:prstGeom>
-        </p:spPr>
-        <p:txBody>
-          <a:bodyPr vert="horz" wrap="square" lIns="0" tIns="43180" rIns="0" bIns="0" rtlCol="0">
-            <a:spAutoFit/>
-          </a:bodyPr>
-          <a:lstStyle/>
-          <a:p>
-            <a:pPr marR="5080" indent="11113" algn="ctr">
-              <a:lnSpc>
-                <a:spcPts val="2300"/>
-              </a:lnSpc>
-              <a:spcBef>
-                <a:spcPts val="340"/>
-              </a:spcBef>
-            </a:pPr>
-            <a:r>
-              <a:rPr lang="en-US" sz="2050" dirty="0">
-                <a:latin typeface="+mn-lt"/>
-                <a:cs typeface="Arial MT"/>
-              </a:rPr>
-              <a:t>Count of Dropout and Graduate Students in Resampled Data</a:t>
-            </a:r>
-          </a:p>
-        </p:txBody>
-      </p:sp>
       <p:pic>
         <p:nvPicPr>
           <p:cNvPr id="29" name="Picture 28">
@@ -10974,8 +10809,8 @@
         </p:blipFill>
         <p:spPr>
           <a:xfrm>
-            <a:off x="891256" y="4558146"/>
-            <a:ext cx="5618314" cy="4021853"/>
+            <a:off x="891256" y="3729566"/>
+            <a:ext cx="5618314" cy="4850433"/>
           </a:xfrm>
           <a:prstGeom prst="rect">
             <a:avLst/>
@@ -11004,8 +10839,8 @@
         </p:blipFill>
         <p:spPr>
           <a:xfrm>
-            <a:off x="11161661" y="4545011"/>
-            <a:ext cx="5850725" cy="4048125"/>
+            <a:off x="11161661" y="3729567"/>
+            <a:ext cx="5850725" cy="4863570"/>
           </a:xfrm>
           <a:prstGeom prst="rect">
             <a:avLst/>
